--- a/deliverables/作品介绍.pptx
+++ b/deliverables/作品介绍.pptx
@@ -7750,7 +7750,7 @@
                           <a:ea typeface="微软雅黑"/>
                           <a:cs typeface="微软雅黑"/>
                         </a:rPr>
-                        <a:t>100.0%（33/33）</a:t>
+                        <a:t>100.0%（35/35）</a:t>
                       </a:r>
                     </a:p>
                   </a:txBody>
@@ -8268,7 +8268,7 @@
                           <a:ea typeface="微软雅黑"/>
                           <a:cs typeface="微软雅黑"/>
                         </a:rPr>
-                        <a:t>0.051 / 0.109 ms</a:t>
+                        <a:t>0.062 / 0.131 ms</a:t>
                       </a:r>
                     </a:p>
                   </a:txBody>
@@ -8366,7 +8366,7 @@
                           <a:ea typeface="微软雅黑"/>
                           <a:cs typeface="微软雅黑"/>
                         </a:rPr>
-                        <a:t>6 大场景 / 25 项能力</a:t>
+                        <a:t>6 大场景 / 27 项能力</a:t>
                       </a:r>
                     </a:p>
                   </a:txBody>
@@ -13492,8 +13492,8 @@
         </p:nvSpPr>
         <p:spPr>
           <a:xfrm>
-            <a:off x="566928" y="1097280"/>
-            <a:ext cx="11057839" cy="3246120"/>
+            <a:off x="566928" y="1051560"/>
+            <a:ext cx="11057839" cy="2834640"/>
           </a:xfrm>
           <a:prstGeom prst="roundRect">
             <a:avLst>
@@ -13539,8 +13539,8 @@
         </p:nvSpPr>
         <p:spPr>
           <a:xfrm>
-            <a:off x="932688" y="1417319"/>
-            <a:ext cx="10326319" cy="2606039"/>
+            <a:off x="932688" y="1371600"/>
+            <a:ext cx="10326319" cy="2194560"/>
           </a:xfrm>
           <a:prstGeom prst="rect">
             <a:avLst/>
@@ -13688,7 +13688,7 @@
         </p:nvSpPr>
         <p:spPr>
           <a:xfrm>
-            <a:off x="566928" y="4471416"/>
+            <a:off x="566928" y="4014215"/>
             <a:ext cx="11057839" cy="457200"/>
           </a:xfrm>
           <a:prstGeom prst="rect">
@@ -13719,7 +13719,7 @@
                 <a:ea typeface="微软雅黑"/>
                 <a:cs typeface="微软雅黑"/>
               </a:rPr>
-              <a:t>截图步骤：切到「攻防演示台」，点 ATK-01 截左侧与右侧对比；再点 ATK-09 截图或录屏</a:t>
+              <a:t>截图步骤：切到「攻防演示台」→ 点 ATK-01 截图 → 再点 ATK-09 截图或录屏</a:t>
             </a:r>
           </a:p>
         </p:txBody>
@@ -13732,8 +13732,8 @@
         </p:nvSpPr>
         <p:spPr>
           <a:xfrm>
-            <a:off x="566928" y="4572000"/>
-            <a:ext cx="11057839" cy="1280160"/>
+            <a:off x="566928" y="4709160"/>
+            <a:ext cx="11057839" cy="1325880"/>
           </a:xfrm>
           <a:prstGeom prst="roundRect">
             <a:avLst>
@@ -13778,8 +13778,8 @@
         </p:nvSpPr>
         <p:spPr>
           <a:xfrm>
-            <a:off x="768096" y="4754880"/>
-            <a:ext cx="10655503" cy="914399"/>
+            <a:off x="768096" y="4892040"/>
+            <a:ext cx="10655503" cy="960119"/>
           </a:xfrm>
           <a:prstGeom prst="rect">
             <a:avLst/>

--- a/deliverables/作品介绍.pptx
+++ b/deliverables/作品介绍.pptx
@@ -7750,7 +7750,7 @@
                           <a:ea typeface="微软雅黑"/>
                           <a:cs typeface="微软雅黑"/>
                         </a:rPr>
-                        <a:t>100.0%（35/35）</a:t>
+                        <a:t>100.0%（48/48）</a:t>
                       </a:r>
                     </a:p>
                   </a:txBody>
@@ -8268,7 +8268,7 @@
                           <a:ea typeface="微软雅黑"/>
                           <a:cs typeface="微软雅黑"/>
                         </a:rPr>
-                        <a:t>0.062 / 0.131 ms</a:t>
+                        <a:t>0.065 / 0.207 ms</a:t>
                       </a:r>
                     </a:p>
                   </a:txBody>
@@ -8420,7 +8420,7 @@
                 <a:ea typeface="微软雅黑"/>
                 <a:cs typeface="微软雅黑"/>
               </a:rPr>
-              <a:t>完整结果见 reports/评测指标结果.md；71 项自动化测试可用 python -m unittest discover -s tests 复现</a:t>
+              <a:t>完整结果见 reports/评测指标结果.md；95 项自动化测试可用 python -m unittest discover -s tests 复现</a:t>
             </a:r>
           </a:p>
         </p:txBody>

--- a/deliverables/作品介绍.pptx
+++ b/deliverables/作品介绍.pptx
@@ -8268,7 +8268,7 @@
                           <a:ea typeface="微软雅黑"/>
                           <a:cs typeface="微软雅黑"/>
                         </a:rPr>
-                        <a:t>0.065 / 0.207 ms</a:t>
+                        <a:t>0.071 / 0.164 ms</a:t>
                       </a:r>
                     </a:p>
                   </a:txBody>
@@ -8420,7 +8420,7 @@
                 <a:ea typeface="微软雅黑"/>
                 <a:cs typeface="微软雅黑"/>
               </a:rPr>
-              <a:t>完整结果见 reports/评测指标结果.md；95 项自动化测试可用 python -m unittest discover -s tests 复现</a:t>
+              <a:t>完整结果见 reports/评测指标结果.md；105 项自动化测试可用 python -m unittest discover -s tests 复现</a:t>
             </a:r>
           </a:p>
         </p:txBody>
@@ -10572,7 +10572,7 @@
                 <a:ea typeface="微软雅黑"/>
                 <a:cs typeface="微软雅黑"/>
               </a:rPr>
-              <a:t>全流程语音播报 + 大字界面</a:t>
+              <a:t>信息不全就追问，答一句就能补上，不必重说整句</a:t>
             </a:r>
           </a:p>
         </p:txBody>

--- a/deliverables/作品介绍.pptx
+++ b/deliverables/作品介绍.pptx
@@ -8268,7 +8268,7 @@
                           <a:ea typeface="微软雅黑"/>
                           <a:cs typeface="微软雅黑"/>
                         </a:rPr>
-                        <a:t>0.071 / 0.164 ms</a:t>
+                        <a:t>0.069 / 0.229 ms</a:t>
                       </a:r>
                     </a:p>
                   </a:txBody>
@@ -8420,7 +8420,7 @@
                 <a:ea typeface="微软雅黑"/>
                 <a:cs typeface="微软雅黑"/>
               </a:rPr>
-              <a:t>完整结果见 reports/评测指标结果.md；105 项自动化测试可用 python -m unittest discover -s tests 复现</a:t>
+              <a:t>完整结果见 reports/评测指标结果.md；107 项自动化测试可用 python -m unittest discover -s tests 复现</a:t>
             </a:r>
           </a:p>
         </p:txBody>
